--- a/content/youtube/shorts/SHORT_SIPO_03_s_ga_8wari.pptx
+++ b/content/youtube/shorts/SHORT_SIPO_03_s_ga_8wari.pptx
@@ -2330,7 +2330,7 @@
                 <a:ea typeface="Hiragino Sans" pitchFamily="34" charset="-122"/>
                 <a:cs typeface="Hiragino Sans" pitchFamily="34" charset="-120"/>
               </a:rPr>
-              <a:t>Sourceが決まれば</a:t>
+              <a:t>Sourceが決まれば、</a:t>
             </a:r>
             <a:endParaRPr lang="en-US" sz="2000" dirty="0"/>
           </a:p>
@@ -2350,7 +2350,7 @@
                 <a:ea typeface="Hiragino Sans" pitchFamily="34" charset="-122"/>
                 <a:cs typeface="Hiragino Sans" pitchFamily="34" charset="-120"/>
               </a:rPr>
-              <a:t>業務は見える</a:t>
+              <a:t>業務は見える。</a:t>
             </a:r>
             <a:endParaRPr lang="en-US" sz="2000" dirty="0"/>
           </a:p>
@@ -2376,23 +2376,6 @@
         <p:txBody>
           <a:bodyPr wrap="square" rtlCol="0" anchor="t"/>
           <a:lstStyle/>
-          <a:p>
-            <a:pPr algn="l" indent="0" marL="0">
-              <a:buNone/>
-            </a:pPr>
-            <a:r>
-              <a:rPr lang="en-US" sz="1200" dirty="0">
-                <a:solidFill>
-                  <a:srgbClr val="57534E"/>
-                </a:solidFill>
-                <a:latin typeface="Hiragino Sans" pitchFamily="34" charset="0"/>
-                <a:ea typeface="Hiragino Sans" pitchFamily="34" charset="-122"/>
-                <a:cs typeface="Hiragino Sans" pitchFamily="34" charset="-120"/>
-              </a:rPr>
-              <a:t>この動画はPowerPointからInsight Training Studioで自動生成しています</a:t>
-            </a:r>
-            <a:endParaRPr lang="en-US" sz="1200" dirty="0"/>
-          </a:p>
           <a:p>
             <a:pPr algn="l" indent="0" marL="0">
               <a:buNone/>
